--- a/assets/pptx/catalog-285.pptx
+++ b/assets/pptx/catalog-285.pptx
@@ -3245,7 +3245,7 @@
                 <a:ea typeface="Ebrima"/>
                 <a:cs typeface="Ebrima"/>
               </a:rPr>
-              <a:t>የደስታ ቀን ነው ደስ እያለን (3x)</a:t>
+              <a:t>የደስታ ቀን ነው ደስ እያለን 3x</a:t>
             </a:r>
           </a:p>
           <a:p>
@@ -3263,7 +3263,7 @@
                 <a:ea typeface="Ebrima"/>
                 <a:cs typeface="Ebrima"/>
               </a:rPr>
-              <a:t>የደስታ ቀን ነው ደስ ይበለን (3x)</a:t>
+              <a:t>የደስታ ቀን ነው ደስ ይበለን 3x</a:t>
             </a:r>
           </a:p>
           <a:p>
@@ -3317,7 +3317,7 @@
                 <a:ea typeface="Ebrima"/>
                 <a:cs typeface="Ebrima"/>
               </a:rPr>
-              <a:t>(ሆሆሆ) እንዘምራለን (አሃ) ደስ እያለን</a:t>
+              <a:t>ሆሆሆ እንዘምራለን አሃ ደስ እያለን</a:t>
             </a:r>
           </a:p>
           <a:p>
@@ -3335,7 +3335,7 @@
                 <a:ea typeface="Ebrima"/>
                 <a:cs typeface="Ebrima"/>
               </a:rPr>
-              <a:t>(ሆሆሆ) እንዘምራለን (አሃ) ደስ እያለን (2x)</a:t>
+              <a:t>ሆሆሆ እንዘምራለን አሃ ደስ እያለን 2x</a:t>
             </a:r>
           </a:p>
         </p:txBody>
@@ -3559,7 +3559,7 @@
                 <a:ea typeface="Ebrima"/>
                 <a:cs typeface="Ebrima"/>
               </a:rPr>
-              <a:t>የደስታ ቀን ነው ደስ እያለን (3x)</a:t>
+              <a:t>የደስታ ቀን ነው ደስ እያለን 3x</a:t>
             </a:r>
           </a:p>
           <a:p>
@@ -3577,7 +3577,7 @@
                 <a:ea typeface="Ebrima"/>
                 <a:cs typeface="Ebrima"/>
               </a:rPr>
-              <a:t>የደስታ ቀን ነው ደስ ይበለን (3x)</a:t>
+              <a:t>የደስታ ቀን ነው ደስ ይበለን 3x</a:t>
             </a:r>
           </a:p>
           <a:p>
@@ -3631,7 +3631,7 @@
                 <a:ea typeface="Ebrima"/>
                 <a:cs typeface="Ebrima"/>
               </a:rPr>
-              <a:t>(ሆሆሆ) እንዘምራለን (አሃ) ደስ እያለን</a:t>
+              <a:t>ሆሆሆ እንዘምራለን አሃ ደስ እያለን</a:t>
             </a:r>
           </a:p>
           <a:p>
@@ -3649,7 +3649,7 @@
                 <a:ea typeface="Ebrima"/>
                 <a:cs typeface="Ebrima"/>
               </a:rPr>
-              <a:t>(ሆሆሆ) እንዘምራለን (አሃ) ደስ እያለን (2x)</a:t>
+              <a:t>ሆሆሆ እንዘምራለን አሃ ደስ እያለን 2x</a:t>
             </a:r>
           </a:p>
         </p:txBody>
@@ -3752,7 +3752,7 @@
                 <a:ea typeface="Ebrima"/>
                 <a:cs typeface="Ebrima"/>
               </a:rPr>
-              <a:t>ወግ ማድረጉ እዚህ መድረሱ መባረኩ መከናወኑ (2x)</a:t>
+              <a:t>ወግ ማድረጉ እዚህ መድረሱ መባረኩ መከናወኑ 2x</a:t>
             </a:r>
           </a:p>
           <a:p>
@@ -3770,7 +3770,7 @@
                 <a:ea typeface="Ebrima"/>
                 <a:cs typeface="Ebrima"/>
               </a:rPr>
-              <a:t>አሃሃሃ አዎ (3x) ከእግዚአብሔር ነው</a:t>
+              <a:t>አሃሃሃ አዎ 3x ከእግዚአብሔር ነው</a:t>
             </a:r>
           </a:p>
           <a:p>
@@ -3788,7 +3788,7 @@
                 <a:ea typeface="Ebrima"/>
                 <a:cs typeface="Ebrima"/>
               </a:rPr>
-              <a:t>አሃሃሃ አዎ (3x) ከእግዚአብሔር ነው</a:t>
+              <a:t>አሃሃሃ አዎ 3x ከእግዚአብሔር ነው</a:t>
             </a:r>
           </a:p>
         </p:txBody>
@@ -3855,7 +3855,7 @@
                 <a:ea typeface="Ebrima"/>
                 <a:cs typeface="Ebrima"/>
               </a:rPr>
-              <a:t>የደስታ ቀን ነው ደስ እያለን (3x)</a:t>
+              <a:t>የደስታ ቀን ነው ደስ እያለን 3x</a:t>
             </a:r>
           </a:p>
           <a:p>
@@ -3873,7 +3873,7 @@
                 <a:ea typeface="Ebrima"/>
                 <a:cs typeface="Ebrima"/>
               </a:rPr>
-              <a:t>የደስታ ቀን ነው ደስ ይበለን (3x)</a:t>
+              <a:t>የደስታ ቀን ነው ደስ ይበለን 3x</a:t>
             </a:r>
           </a:p>
           <a:p>
@@ -3927,7 +3927,7 @@
                 <a:ea typeface="Ebrima"/>
                 <a:cs typeface="Ebrima"/>
               </a:rPr>
-              <a:t>(ሆሆሆ) እንዘምራለን (አሃ) ደስ እያለን</a:t>
+              <a:t>ሆሆሆ እንዘምራለን አሃ ደስ እያለን</a:t>
             </a:r>
           </a:p>
           <a:p>
@@ -3945,7 +3945,7 @@
                 <a:ea typeface="Ebrima"/>
                 <a:cs typeface="Ebrima"/>
               </a:rPr>
-              <a:t>(ሆሆሆ) እንዘምራለን (አሃ) ደስ እያለን (2x)</a:t>
+              <a:t>ሆሆሆ እንዘምራለን አሃ ደስ እያለን 2x</a:t>
             </a:r>
           </a:p>
         </p:txBody>
